--- a/curso_es/pptx/S58.pptx
+++ b/curso_es/pptx/S58.pptx
@@ -3718,7 +3718,7 @@
                 </a:solidFill>
                 <a:latin typeface="Fredoka"/>
               </a:rPr>
-              <a:t>Caso 1 · Naiara y los móviles</a:t>
+              <a:t>Caso 1 · Los móviles en clase</a:t>
             </a:r>
           </a:p>
         </p:txBody>
@@ -3800,7 +3800,7 @@
                 </a:solidFill>
                 <a:latin typeface="Nunito Sans"/>
               </a:rPr>
-              <a:t>Naiara: «Los móviles deberían estar prohibidos en clase». Aitor: «O sea, que quieres volver a la Edad de Piedra».</a:t>
+              <a:t>Una chica: «Los móviles deberían estar prohibidos en clase». Un chico: «O sea, que quieres volver a la Edad de Piedra».</a:t>
             </a:r>
           </a:p>
         </p:txBody>
@@ -3848,7 +3848,7 @@
                 </a:solidFill>
                 <a:latin typeface="Nunito Sans"/>
               </a:rPr>
-              <a:t>Aitor deforma la idea: nadie ha dicho «volver a la Edad de Piedra».</a:t>
+              <a:t>El chico deforma la idea: nadie ha dicho «volver a la Edad de Piedra».</a:t>
             </a:r>
           </a:p>
           <a:p>
@@ -4418,7 +4418,7 @@
                 </a:solidFill>
                 <a:latin typeface="Nunito Sans"/>
               </a:rPr>
-              <a:t>Iker escribe: «Todos los que juegan a la consola son unos vagos». Leire contesta: «O sea, que Chen, que juega y saca sobresalientes, es un vago».</a:t>
+              <a:t>Un chico escribe: «Todos los que juegan a la consola son unos vagos». Una chica contesta: «O sea, que un compañero, que juega y saca sobresalientes, es un vago».</a:t>
             </a:r>
           </a:p>
         </p:txBody>
@@ -4466,7 +4466,7 @@
                 </a:solidFill>
                 <a:latin typeface="Nunito Sans"/>
               </a:rPr>
-              <a:t>Leire lleva la idea de Iker a un caso extremo. ¿Es un hombre de paja?</a:t>
+              <a:t>La chica lleva la idea del chico a un caso extremo. ¿Es un hombre de paja?</a:t>
             </a:r>
           </a:p>
           <a:p>
@@ -4491,7 +4491,7 @@
                 </a:solidFill>
                 <a:latin typeface="Nunito Sans"/>
               </a:rPr>
-              <a:t>¿Qué dijo Iker? «Todos». Leire no cambia sus palabras.</a:t>
+              <a:t>¿Qué dijo el chico? «Todos». La chica no cambia sus palabras.</a:t>
             </a:r>
           </a:p>
           <a:p>
@@ -6694,7 +6694,7 @@
                 </a:solidFill>
                 <a:latin typeface="Nunito Sans"/>
               </a:rPr>
-              <a:t>Naiara dice: «Los móviles deberían estar prohibidos en clase». Aitor responde: «O sea, que quieres volver a la Edad de Piedra».</a:t>
+              <a:t>Una chica dice: «Los móviles deberían estar prohibidos en clase». Un chico responde: «O sea, que quieres volver a la Edad de Piedra».</a:t>
             </a:r>
           </a:p>
         </p:txBody>
@@ -6733,7 +6733,7 @@
                 </a:solidFill>
                 <a:latin typeface="Nunito Sans"/>
               </a:rPr>
-              <a:t>¿Ha entendido Aitor lo que quería decir Naiara?</a:t>
+              <a:t>¿Ha entendido ese chico lo que quería decir la chica?</a:t>
             </a:r>
           </a:p>
         </p:txBody>
